--- a/slides/datasets-in-10-minutes-civil-comments.pptx
+++ b/slides/datasets-in-10-minutes-civil-comments.pptx
@@ -10417,7 +10417,7 @@
                 <a:ea typeface="Noto Sans CJK JP"/>
                 <a:cs typeface="Noto Sans"/>
               </a:rPr>
-              <a:t>WILDS Table 15のtest、%。5乱数seedの平均。属性と有害性の組合せで集団を定義。</a:t>
+              <a:t>WILDSのtest、%。5乱数seedの平均。属性と有害性の組合せで集団を定義。</a:t>
             </a:r>
           </a:p>
         </p:txBody>
